--- a/projects/2025_11_10.pptx
+++ b/projects/2025_11_10.pptx
@@ -228,7 +228,7 @@
           <a:p>
             <a:fld id="{48984AA6-6FD4-4B2D-BE97-CD865C409230}" type="datetimeFigureOut">
               <a:rPr lang="en-US" smtClean="0"/>
-              <a:t>11/10/25</a:t>
+              <a:t>11/12/25</a:t>
             </a:fld>
             <a:endParaRPr lang="en-US" dirty="0"/>
           </a:p>
@@ -3003,7 +3003,7 @@
             <a:fld id="{241EB5C9-1307-BA42-ABA2-0BC069CD8E7F}" type="datetimeFigureOut">
               <a:rPr lang="en-US" smtClean="0"/>
               <a:pPr/>
-              <a:t>11/10/25</a:t>
+              <a:t>11/12/25</a:t>
             </a:fld>
             <a:endParaRPr lang="en-US" dirty="0"/>
           </a:p>
@@ -3188,7 +3188,7 @@
           <a:p>
             <a:fld id="{241EB5C9-1307-BA42-ABA2-0BC069CD8E7F}" type="datetimeFigureOut">
               <a:rPr lang="en-US" smtClean="0"/>
-              <a:t>11/10/25</a:t>
+              <a:t>11/12/25</a:t>
             </a:fld>
             <a:endParaRPr lang="en-US" dirty="0"/>
           </a:p>
@@ -3366,7 +3366,7 @@
           <a:p>
             <a:fld id="{241EB5C9-1307-BA42-ABA2-0BC069CD8E7F}" type="datetimeFigureOut">
               <a:rPr lang="en-US" smtClean="0"/>
-              <a:t>11/10/25</a:t>
+              <a:t>11/12/25</a:t>
             </a:fld>
             <a:endParaRPr lang="en-US" dirty="0"/>
           </a:p>
@@ -3542,7 +3542,7 @@
           <a:p>
             <a:fld id="{241EB5C9-1307-BA42-ABA2-0BC069CD8E7F}" type="datetimeFigureOut">
               <a:rPr lang="en-US" smtClean="0"/>
-              <a:t>11/10/25</a:t>
+              <a:t>11/12/25</a:t>
             </a:fld>
             <a:endParaRPr lang="en-US" dirty="0"/>
           </a:p>
@@ -3789,7 +3789,7 @@
           <a:p>
             <a:fld id="{241EB5C9-1307-BA42-ABA2-0BC069CD8E7F}" type="datetimeFigureOut">
               <a:rPr lang="en-US" smtClean="0"/>
-              <a:t>11/10/25</a:t>
+              <a:t>11/12/25</a:t>
             </a:fld>
             <a:endParaRPr lang="en-US" dirty="0"/>
           </a:p>
@@ -4082,7 +4082,7 @@
           <a:p>
             <a:fld id="{241EB5C9-1307-BA42-ABA2-0BC069CD8E7F}" type="datetimeFigureOut">
               <a:rPr lang="en-US" smtClean="0"/>
-              <a:t>11/10/25</a:t>
+              <a:t>11/12/25</a:t>
             </a:fld>
             <a:endParaRPr lang="en-US" dirty="0"/>
           </a:p>
@@ -4505,7 +4505,7 @@
           <a:p>
             <a:fld id="{241EB5C9-1307-BA42-ABA2-0BC069CD8E7F}" type="datetimeFigureOut">
               <a:rPr lang="en-US" smtClean="0"/>
-              <a:t>11/10/25</a:t>
+              <a:t>11/12/25</a:t>
             </a:fld>
             <a:endParaRPr lang="en-US" dirty="0"/>
           </a:p>
@@ -4630,7 +4630,7 @@
           <a:p>
             <a:fld id="{241EB5C9-1307-BA42-ABA2-0BC069CD8E7F}" type="datetimeFigureOut">
               <a:rPr lang="en-US" smtClean="0"/>
-              <a:t>11/10/25</a:t>
+              <a:t>11/12/25</a:t>
             </a:fld>
             <a:endParaRPr lang="en-US" dirty="0"/>
           </a:p>
@@ -4725,7 +4725,7 @@
           <a:p>
             <a:fld id="{241EB5C9-1307-BA42-ABA2-0BC069CD8E7F}" type="datetimeFigureOut">
               <a:rPr lang="en-US" smtClean="0"/>
-              <a:t>11/10/25</a:t>
+              <a:t>11/12/25</a:t>
             </a:fld>
             <a:endParaRPr lang="en-US" dirty="0"/>
           </a:p>
@@ -5000,7 +5000,7 @@
           <a:p>
             <a:fld id="{241EB5C9-1307-BA42-ABA2-0BC069CD8E7F}" type="datetimeFigureOut">
               <a:rPr lang="en-US" smtClean="0"/>
-              <a:t>11/10/25</a:t>
+              <a:t>11/12/25</a:t>
             </a:fld>
             <a:endParaRPr lang="en-US" dirty="0"/>
           </a:p>
@@ -5252,7 +5252,7 @@
           <a:p>
             <a:fld id="{241EB5C9-1307-BA42-ABA2-0BC069CD8E7F}" type="datetimeFigureOut">
               <a:rPr lang="en-US" smtClean="0"/>
-              <a:t>11/10/25</a:t>
+              <a:t>11/12/25</a:t>
             </a:fld>
             <a:endParaRPr lang="en-US" dirty="0"/>
           </a:p>
@@ -5469,7 +5469,7 @@
           <a:p>
             <a:fld id="{241EB5C9-1307-BA42-ABA2-0BC069CD8E7F}" type="datetimeFigureOut">
               <a:rPr lang="en-US" smtClean="0"/>
-              <a:t>11/10/25</a:t>
+              <a:t>11/12/25</a:t>
             </a:fld>
             <a:endParaRPr lang="en-US" dirty="0"/>
           </a:p>
@@ -8310,7 +8310,7 @@
         </p:blipFill>
         <p:spPr>
           <a:xfrm>
-            <a:off x="3131688" y="1600198"/>
+            <a:off x="3143411" y="1623644"/>
             <a:ext cx="5817786" cy="4525963"/>
           </a:xfrm>
           <a:prstGeom prst="rect">
